--- a/docs/Diagrams.pptx
+++ b/docs/Diagrams.pptx
@@ -105,6 +105,11 @@
       </a:defRPr>
     </a:lvl9pPr>
   </p:defaultTextStyle>
+  <p:extLst>
+    <p:ext uri="{EFAFB233-063F-42B5-8137-9DF3F51BA10A}">
+      <p15:sldGuideLst xmlns:p15="http://schemas.microsoft.com/office/powerpoint/2012/main"/>
+    </p:ext>
+  </p:extLst>
 </p:presentation>
 </file>
 
@@ -255,7 +260,7 @@
           <a:p>
             <a:fld id="{B9B65B95-89D5-440B-8A50-A9C8934CB761}" type="datetimeFigureOut">
               <a:rPr lang="en-US" smtClean="0"/>
-              <a:t>7/27/2026</a:t>
+              <a:t>8/11/2026</a:t>
             </a:fld>
             <a:endParaRPr lang="en-US"/>
           </a:p>
@@ -453,7 +458,7 @@
           <a:p>
             <a:fld id="{B9B65B95-89D5-440B-8A50-A9C8934CB761}" type="datetimeFigureOut">
               <a:rPr lang="en-US" smtClean="0"/>
-              <a:t>7/27/2026</a:t>
+              <a:t>8/11/2026</a:t>
             </a:fld>
             <a:endParaRPr lang="en-US"/>
           </a:p>
@@ -661,7 +666,7 @@
           <a:p>
             <a:fld id="{B9B65B95-89D5-440B-8A50-A9C8934CB761}" type="datetimeFigureOut">
               <a:rPr lang="en-US" smtClean="0"/>
-              <a:t>7/27/2026</a:t>
+              <a:t>8/11/2026</a:t>
             </a:fld>
             <a:endParaRPr lang="en-US"/>
           </a:p>
@@ -859,7 +864,7 @@
           <a:p>
             <a:fld id="{B9B65B95-89D5-440B-8A50-A9C8934CB761}" type="datetimeFigureOut">
               <a:rPr lang="en-US" smtClean="0"/>
-              <a:t>7/27/2026</a:t>
+              <a:t>8/11/2026</a:t>
             </a:fld>
             <a:endParaRPr lang="en-US"/>
           </a:p>
@@ -1134,7 +1139,7 @@
           <a:p>
             <a:fld id="{B9B65B95-89D5-440B-8A50-A9C8934CB761}" type="datetimeFigureOut">
               <a:rPr lang="en-US" smtClean="0"/>
-              <a:t>7/27/2026</a:t>
+              <a:t>8/11/2026</a:t>
             </a:fld>
             <a:endParaRPr lang="en-US"/>
           </a:p>
@@ -1399,7 +1404,7 @@
           <a:p>
             <a:fld id="{B9B65B95-89D5-440B-8A50-A9C8934CB761}" type="datetimeFigureOut">
               <a:rPr lang="en-US" smtClean="0"/>
-              <a:t>7/27/2026</a:t>
+              <a:t>8/11/2026</a:t>
             </a:fld>
             <a:endParaRPr lang="en-US"/>
           </a:p>
@@ -1811,7 +1816,7 @@
           <a:p>
             <a:fld id="{B9B65B95-89D5-440B-8A50-A9C8934CB761}" type="datetimeFigureOut">
               <a:rPr lang="en-US" smtClean="0"/>
-              <a:t>7/27/2026</a:t>
+              <a:t>8/11/2026</a:t>
             </a:fld>
             <a:endParaRPr lang="en-US"/>
           </a:p>
@@ -1952,7 +1957,7 @@
           <a:p>
             <a:fld id="{B9B65B95-89D5-440B-8A50-A9C8934CB761}" type="datetimeFigureOut">
               <a:rPr lang="en-US" smtClean="0"/>
-              <a:t>7/27/2026</a:t>
+              <a:t>8/11/2026</a:t>
             </a:fld>
             <a:endParaRPr lang="en-US"/>
           </a:p>
@@ -2065,7 +2070,7 @@
           <a:p>
             <a:fld id="{B9B65B95-89D5-440B-8A50-A9C8934CB761}" type="datetimeFigureOut">
               <a:rPr lang="en-US" smtClean="0"/>
-              <a:t>7/27/2026</a:t>
+              <a:t>8/11/2026</a:t>
             </a:fld>
             <a:endParaRPr lang="en-US"/>
           </a:p>
@@ -2376,7 +2381,7 @@
           <a:p>
             <a:fld id="{B9B65B95-89D5-440B-8A50-A9C8934CB761}" type="datetimeFigureOut">
               <a:rPr lang="en-US" smtClean="0"/>
-              <a:t>7/27/2026</a:t>
+              <a:t>8/11/2026</a:t>
             </a:fld>
             <a:endParaRPr lang="en-US"/>
           </a:p>
@@ -2664,7 +2669,7 @@
           <a:p>
             <a:fld id="{B9B65B95-89D5-440B-8A50-A9C8934CB761}" type="datetimeFigureOut">
               <a:rPr lang="en-US" smtClean="0"/>
-              <a:t>7/27/2026</a:t>
+              <a:t>8/11/2026</a:t>
             </a:fld>
             <a:endParaRPr lang="en-US"/>
           </a:p>
@@ -2905,7 +2910,7 @@
           <a:p>
             <a:fld id="{B9B65B95-89D5-440B-8A50-A9C8934CB761}" type="datetimeFigureOut">
               <a:rPr lang="en-US" smtClean="0"/>
-              <a:t>7/27/2026</a:t>
+              <a:t>8/11/2026</a:t>
             </a:fld>
             <a:endParaRPr lang="en-US"/>
           </a:p>
@@ -4931,7 +4936,7 @@
           </p:nvSpPr>
           <p:spPr>
             <a:xfrm>
-              <a:off x="4640179" y="1937085"/>
+              <a:off x="4640179" y="2418661"/>
               <a:ext cx="2911642" cy="1251284"/>
             </a:xfrm>
             <a:prstGeom prst="rect">
@@ -4980,7 +4985,7 @@
           </p:nvSpPr>
           <p:spPr>
             <a:xfrm>
-              <a:off x="5478379" y="3392905"/>
+              <a:off x="5539040" y="3883256"/>
               <a:ext cx="1235242" cy="553453"/>
             </a:xfrm>
             <a:prstGeom prst="rect">
@@ -5029,7 +5034,7 @@
           </p:nvSpPr>
           <p:spPr>
             <a:xfrm>
-              <a:off x="3551321" y="4150894"/>
+              <a:off x="3551321" y="5519612"/>
               <a:ext cx="5089358" cy="1383632"/>
             </a:xfrm>
             <a:prstGeom prst="rect">
@@ -5078,8 +5083,8 @@
           </p:nvSpPr>
           <p:spPr>
             <a:xfrm>
-              <a:off x="3564355" y="5739061"/>
-              <a:ext cx="2151647" cy="1263315"/>
+              <a:off x="3551321" y="3871285"/>
+              <a:ext cx="1745947" cy="1495494"/>
             </a:xfrm>
             <a:prstGeom prst="rect">
               <a:avLst/>
@@ -5127,8 +5132,8 @@
           </p:nvSpPr>
           <p:spPr>
             <a:xfrm>
-              <a:off x="5894471" y="5739061"/>
-              <a:ext cx="2746208" cy="1263315"/>
+              <a:off x="4640179" y="1078929"/>
+              <a:ext cx="2911642" cy="1263315"/>
             </a:xfrm>
             <a:prstGeom prst="rect">
               <a:avLst/>
@@ -5164,55 +5169,6 @@
         </p:sp>
         <p:sp>
           <p:nvSpPr>
-            <p:cNvPr id="20" name="Rectangle 19">
-              <a:extLst>
-                <a:ext uri="{FF2B5EF4-FFF2-40B4-BE49-F238E27FC236}">
-                  <a16:creationId xmlns:a16="http://schemas.microsoft.com/office/drawing/2014/main" id="{C5A066F7-82B0-63C5-F298-3D9FE28EE123}"/>
-                </a:ext>
-              </a:extLst>
-            </p:cNvPr>
-            <p:cNvSpPr/>
-            <p:nvPr/>
-          </p:nvSpPr>
-          <p:spPr>
-            <a:xfrm rot="5400000">
-              <a:off x="7618246" y="2165936"/>
-              <a:ext cx="1251284" cy="793582"/>
-            </a:xfrm>
-            <a:prstGeom prst="rect">
-              <a:avLst/>
-            </a:prstGeom>
-          </p:spPr>
-          <p:style>
-            <a:lnRef idx="2">
-              <a:schemeClr val="accent1">
-                <a:shade val="15000"/>
-              </a:schemeClr>
-            </a:lnRef>
-            <a:fillRef idx="1">
-              <a:schemeClr val="accent1"/>
-            </a:fillRef>
-            <a:effectRef idx="0">
-              <a:schemeClr val="accent1"/>
-            </a:effectRef>
-            <a:fontRef idx="minor">
-              <a:schemeClr val="lt1"/>
-            </a:fontRef>
-          </p:style>
-          <p:txBody>
-            <a:bodyPr rtlCol="0" anchor="ctr"/>
-            <a:lstStyle/>
-            <a:p>
-              <a:pPr algn="ctr"/>
-              <a:r>
-                <a:rPr lang="en-US" dirty="0"/>
-                <a:t>Holder for Antenna</a:t>
-              </a:r>
-            </a:p>
-          </p:txBody>
-        </p:sp>
-        <p:sp>
-          <p:nvSpPr>
             <p:cNvPr id="22" name="Rectangle 21">
               <a:extLst>
                 <a:ext uri="{FF2B5EF4-FFF2-40B4-BE49-F238E27FC236}">
@@ -5225,8 +5181,8 @@
           </p:nvSpPr>
           <p:spPr>
             <a:xfrm>
-              <a:off x="3388894" y="938967"/>
-              <a:ext cx="1251284" cy="793582"/>
+              <a:off x="7128710" y="3871285"/>
+              <a:ext cx="1251284" cy="1495494"/>
             </a:xfrm>
             <a:prstGeom prst="rect">
               <a:avLst/>
@@ -5274,7 +5230,7 @@
           </p:nvSpPr>
           <p:spPr>
             <a:xfrm>
-              <a:off x="3388894" y="-47118"/>
+              <a:off x="5539040" y="4575384"/>
               <a:ext cx="1251284" cy="793582"/>
             </a:xfrm>
             <a:prstGeom prst="rect">
@@ -5323,8 +5279,8 @@
           </p:nvSpPr>
           <p:spPr>
             <a:xfrm>
-              <a:off x="4939969" y="-47118"/>
-              <a:ext cx="3700710" cy="1779667"/>
+              <a:off x="4640179" y="-156655"/>
+              <a:ext cx="2911642" cy="1159168"/>
             </a:xfrm>
             <a:prstGeom prst="rect">
               <a:avLst/>

--- a/docs/Diagrams.pptx
+++ b/docs/Diagrams.pptx
@@ -4862,10 +4862,10 @@
         </p:nvGrpSpPr>
         <p:grpSpPr>
           <a:xfrm>
-            <a:off x="3272589" y="-228599"/>
-            <a:ext cx="5558590" cy="7327232"/>
-            <a:chOff x="3272589" y="-228599"/>
-            <a:chExt cx="5558590" cy="7327232"/>
+            <a:off x="4336009" y="-359486"/>
+            <a:ext cx="3762771" cy="7673096"/>
+            <a:chOff x="4424294" y="-678802"/>
+            <a:chExt cx="3699809" cy="7687822"/>
           </a:xfrm>
         </p:grpSpPr>
         <p:sp>
@@ -4882,8 +4882,8 @@
           </p:nvSpPr>
           <p:spPr>
             <a:xfrm>
-              <a:off x="3272589" y="-228599"/>
-              <a:ext cx="5558590" cy="7327232"/>
+              <a:off x="4424294" y="-678802"/>
+              <a:ext cx="3699809" cy="7687822"/>
             </a:xfrm>
             <a:prstGeom prst="rect">
               <a:avLst/>
@@ -4936,7 +4936,7 @@
           </p:nvSpPr>
           <p:spPr>
             <a:xfrm>
-              <a:off x="4640179" y="2418661"/>
+              <a:off x="4640179" y="1819462"/>
               <a:ext cx="2911642" cy="1251284"/>
             </a:xfrm>
             <a:prstGeom prst="rect">
@@ -4984,8 +4984,8 @@
             <p:nvPr/>
           </p:nvSpPr>
           <p:spPr>
-            <a:xfrm>
-              <a:off x="5539040" y="3883256"/>
+            <a:xfrm rot="5400000">
+              <a:off x="6566159" y="4579161"/>
               <a:ext cx="1235242" cy="553453"/>
             </a:xfrm>
             <a:prstGeom prst="rect">
@@ -5034,8 +5034,8 @@
           </p:nvSpPr>
           <p:spPr>
             <a:xfrm>
-              <a:off x="3551321" y="5519612"/>
-              <a:ext cx="5089358" cy="1383632"/>
+              <a:off x="4424294" y="5625387"/>
+              <a:ext cx="3699809" cy="1383632"/>
             </a:xfrm>
             <a:prstGeom prst="rect">
               <a:avLst/>
@@ -5083,8 +5083,8 @@
           </p:nvSpPr>
           <p:spPr>
             <a:xfrm>
-              <a:off x="3551321" y="3871285"/>
-              <a:ext cx="1745947" cy="1495494"/>
+              <a:off x="5198369" y="4085753"/>
+              <a:ext cx="1146405" cy="1495494"/>
             </a:xfrm>
             <a:prstGeom prst="rect">
               <a:avLst/>
@@ -5132,8 +5132,8 @@
           </p:nvSpPr>
           <p:spPr>
             <a:xfrm>
-              <a:off x="4640179" y="1078929"/>
-              <a:ext cx="2911642" cy="1263315"/>
+              <a:off x="4737109" y="3169920"/>
+              <a:ext cx="2723398" cy="869998"/>
             </a:xfrm>
             <a:prstGeom prst="rect">
               <a:avLst/>
@@ -5181,8 +5181,8 @@
           </p:nvSpPr>
           <p:spPr>
             <a:xfrm>
-              <a:off x="7128710" y="3871285"/>
-              <a:ext cx="1251284" cy="1495494"/>
+              <a:off x="6696128" y="584355"/>
+              <a:ext cx="835771" cy="1159168"/>
             </a:xfrm>
             <a:prstGeom prst="rect">
               <a:avLst/>
@@ -5230,8 +5230,8 @@
           </p:nvSpPr>
           <p:spPr>
             <a:xfrm>
-              <a:off x="5539040" y="4575384"/>
-              <a:ext cx="1251284" cy="793582"/>
+              <a:off x="6676615" y="-285166"/>
+              <a:ext cx="875206" cy="793582"/>
             </a:xfrm>
             <a:prstGeom prst="rect">
               <a:avLst/>
@@ -5279,8 +5279,8 @@
           </p:nvSpPr>
           <p:spPr>
             <a:xfrm>
-              <a:off x="4640179" y="-156655"/>
-              <a:ext cx="2911642" cy="1159168"/>
+              <a:off x="4640179" y="-678802"/>
+              <a:ext cx="1848192" cy="2399090"/>
             </a:xfrm>
             <a:prstGeom prst="rect">
               <a:avLst/>

--- a/docs/Diagrams.pptx
+++ b/docs/Diagrams.pptx
@@ -260,7 +260,7 @@
           <a:p>
             <a:fld id="{B9B65B95-89D5-440B-8A50-A9C8934CB761}" type="datetimeFigureOut">
               <a:rPr lang="en-US" smtClean="0"/>
-              <a:t>8/11/2026</a:t>
+              <a:t>10/3/2026</a:t>
             </a:fld>
             <a:endParaRPr lang="en-US"/>
           </a:p>
@@ -458,7 +458,7 @@
           <a:p>
             <a:fld id="{B9B65B95-89D5-440B-8A50-A9C8934CB761}" type="datetimeFigureOut">
               <a:rPr lang="en-US" smtClean="0"/>
-              <a:t>8/11/2026</a:t>
+              <a:t>10/3/2026</a:t>
             </a:fld>
             <a:endParaRPr lang="en-US"/>
           </a:p>
@@ -666,7 +666,7 @@
           <a:p>
             <a:fld id="{B9B65B95-89D5-440B-8A50-A9C8934CB761}" type="datetimeFigureOut">
               <a:rPr lang="en-US" smtClean="0"/>
-              <a:t>8/11/2026</a:t>
+              <a:t>10/3/2026</a:t>
             </a:fld>
             <a:endParaRPr lang="en-US"/>
           </a:p>
@@ -864,7 +864,7 @@
           <a:p>
             <a:fld id="{B9B65B95-89D5-440B-8A50-A9C8934CB761}" type="datetimeFigureOut">
               <a:rPr lang="en-US" smtClean="0"/>
-              <a:t>8/11/2026</a:t>
+              <a:t>10/3/2026</a:t>
             </a:fld>
             <a:endParaRPr lang="en-US"/>
           </a:p>
@@ -1139,7 +1139,7 @@
           <a:p>
             <a:fld id="{B9B65B95-89D5-440B-8A50-A9C8934CB761}" type="datetimeFigureOut">
               <a:rPr lang="en-US" smtClean="0"/>
-              <a:t>8/11/2026</a:t>
+              <a:t>10/3/2026</a:t>
             </a:fld>
             <a:endParaRPr lang="en-US"/>
           </a:p>
@@ -1404,7 +1404,7 @@
           <a:p>
             <a:fld id="{B9B65B95-89D5-440B-8A50-A9C8934CB761}" type="datetimeFigureOut">
               <a:rPr lang="en-US" smtClean="0"/>
-              <a:t>8/11/2026</a:t>
+              <a:t>10/3/2026</a:t>
             </a:fld>
             <a:endParaRPr lang="en-US"/>
           </a:p>
@@ -1816,7 +1816,7 @@
           <a:p>
             <a:fld id="{B9B65B95-89D5-440B-8A50-A9C8934CB761}" type="datetimeFigureOut">
               <a:rPr lang="en-US" smtClean="0"/>
-              <a:t>8/11/2026</a:t>
+              <a:t>10/3/2026</a:t>
             </a:fld>
             <a:endParaRPr lang="en-US"/>
           </a:p>
@@ -1957,7 +1957,7 @@
           <a:p>
             <a:fld id="{B9B65B95-89D5-440B-8A50-A9C8934CB761}" type="datetimeFigureOut">
               <a:rPr lang="en-US" smtClean="0"/>
-              <a:t>8/11/2026</a:t>
+              <a:t>10/3/2026</a:t>
             </a:fld>
             <a:endParaRPr lang="en-US"/>
           </a:p>
@@ -2070,7 +2070,7 @@
           <a:p>
             <a:fld id="{B9B65B95-89D5-440B-8A50-A9C8934CB761}" type="datetimeFigureOut">
               <a:rPr lang="en-US" smtClean="0"/>
-              <a:t>8/11/2026</a:t>
+              <a:t>10/3/2026</a:t>
             </a:fld>
             <a:endParaRPr lang="en-US"/>
           </a:p>
@@ -2381,7 +2381,7 @@
           <a:p>
             <a:fld id="{B9B65B95-89D5-440B-8A50-A9C8934CB761}" type="datetimeFigureOut">
               <a:rPr lang="en-US" smtClean="0"/>
-              <a:t>8/11/2026</a:t>
+              <a:t>10/3/2026</a:t>
             </a:fld>
             <a:endParaRPr lang="en-US"/>
           </a:p>
@@ -2669,7 +2669,7 @@
           <a:p>
             <a:fld id="{B9B65B95-89D5-440B-8A50-A9C8934CB761}" type="datetimeFigureOut">
               <a:rPr lang="en-US" smtClean="0"/>
-              <a:t>8/11/2026</a:t>
+              <a:t>10/3/2026</a:t>
             </a:fld>
             <a:endParaRPr lang="en-US"/>
           </a:p>
@@ -2910,7 +2910,7 @@
           <a:p>
             <a:fld id="{B9B65B95-89D5-440B-8A50-A9C8934CB761}" type="datetimeFigureOut">
               <a:rPr lang="en-US" smtClean="0"/>
-              <a:t>8/11/2026</a:t>
+              <a:t>10/3/2026</a:t>
             </a:fld>
             <a:endParaRPr lang="en-US"/>
           </a:p>
@@ -3452,62 +3452,6 @@
         </p:sp>
         <p:sp>
           <p:nvSpPr>
-            <p:cNvPr id="5" name="Rectangle 4">
-              <a:extLst>
-                <a:ext uri="{FF2B5EF4-FFF2-40B4-BE49-F238E27FC236}">
-                  <a16:creationId xmlns:a16="http://schemas.microsoft.com/office/drawing/2014/main" id="{70D41FFC-1F8B-9D37-74B6-523738CB73B6}"/>
-                </a:ext>
-              </a:extLst>
-            </p:cNvPr>
-            <p:cNvSpPr/>
-            <p:nvPr/>
-          </p:nvSpPr>
-          <p:spPr>
-            <a:xfrm>
-              <a:off x="7641433" y="10551"/>
-              <a:ext cx="1229710" cy="646386"/>
-            </a:xfrm>
-            <a:prstGeom prst="rect">
-              <a:avLst/>
-            </a:prstGeom>
-            <a:solidFill>
-              <a:srgbClr val="FFFF00"/>
-            </a:solidFill>
-          </p:spPr>
-          <p:style>
-            <a:lnRef idx="2">
-              <a:schemeClr val="accent1">
-                <a:shade val="15000"/>
-              </a:schemeClr>
-            </a:lnRef>
-            <a:fillRef idx="1">
-              <a:schemeClr val="accent1"/>
-            </a:fillRef>
-            <a:effectRef idx="0">
-              <a:schemeClr val="accent1"/>
-            </a:effectRef>
-            <a:fontRef idx="minor">
-              <a:schemeClr val="lt1"/>
-            </a:fontRef>
-          </p:style>
-          <p:txBody>
-            <a:bodyPr rtlCol="0" anchor="ctr"/>
-            <a:lstStyle/>
-            <a:p>
-              <a:pPr algn="ctr"/>
-              <a:r>
-                <a:rPr lang="en-US" dirty="0">
-                  <a:solidFill>
-                    <a:schemeClr val="tx1"/>
-                  </a:solidFill>
-                </a:rPr>
-                <a:t>Solar Pannel</a:t>
-              </a:r>
-            </a:p>
-          </p:txBody>
-        </p:sp>
-        <p:sp>
-          <p:nvSpPr>
             <p:cNvPr id="7" name="Rectangle 6">
               <a:extLst>
                 <a:ext uri="{FF2B5EF4-FFF2-40B4-BE49-F238E27FC236}">
@@ -3520,7 +3464,7 @@
           </p:nvSpPr>
           <p:spPr>
             <a:xfrm>
-              <a:off x="7641433" y="1134599"/>
+              <a:off x="7175937" y="600611"/>
               <a:ext cx="1229710" cy="646386"/>
             </a:xfrm>
             <a:prstGeom prst="rect">
@@ -3558,62 +3502,6 @@
                   </a:solidFill>
                 </a:rPr>
                 <a:t>Power Outlet</a:t>
-              </a:r>
-            </a:p>
-          </p:txBody>
-        </p:sp>
-        <p:sp>
-          <p:nvSpPr>
-            <p:cNvPr id="9" name="Rectangle 8">
-              <a:extLst>
-                <a:ext uri="{FF2B5EF4-FFF2-40B4-BE49-F238E27FC236}">
-                  <a16:creationId xmlns:a16="http://schemas.microsoft.com/office/drawing/2014/main" id="{1E61F0AF-6F1E-A27F-86A3-4905168BA832}"/>
-                </a:ext>
-              </a:extLst>
-            </p:cNvPr>
-            <p:cNvSpPr/>
-            <p:nvPr/>
-          </p:nvSpPr>
-          <p:spPr>
-            <a:xfrm>
-              <a:off x="5946228" y="789454"/>
-              <a:ext cx="1229710" cy="646386"/>
-            </a:xfrm>
-            <a:prstGeom prst="rect">
-              <a:avLst/>
-            </a:prstGeom>
-            <a:solidFill>
-              <a:srgbClr val="FFFF00"/>
-            </a:solidFill>
-          </p:spPr>
-          <p:style>
-            <a:lnRef idx="2">
-              <a:schemeClr val="accent1">
-                <a:shade val="15000"/>
-              </a:schemeClr>
-            </a:lnRef>
-            <a:fillRef idx="1">
-              <a:schemeClr val="accent1"/>
-            </a:fillRef>
-            <a:effectRef idx="0">
-              <a:schemeClr val="accent1"/>
-            </a:effectRef>
-            <a:fontRef idx="minor">
-              <a:schemeClr val="lt1"/>
-            </a:fontRef>
-          </p:style>
-          <p:txBody>
-            <a:bodyPr rtlCol="0" anchor="ctr"/>
-            <a:lstStyle/>
-            <a:p>
-              <a:pPr algn="ctr"/>
-              <a:r>
-                <a:rPr lang="en-US" sz="1200" dirty="0">
-                  <a:solidFill>
-                    <a:schemeClr val="tx1"/>
-                  </a:solidFill>
-                </a:rPr>
-                <a:t>Solar USB Charger Controller</a:t>
               </a:r>
             </a:p>
           </p:txBody>
@@ -4203,49 +4091,6 @@
         </p:sp>
         <p:cxnSp>
           <p:nvCxnSpPr>
-            <p:cNvPr id="94" name="Connector: Elbow 93">
-              <a:extLst>
-                <a:ext uri="{FF2B5EF4-FFF2-40B4-BE49-F238E27FC236}">
-                  <a16:creationId xmlns:a16="http://schemas.microsoft.com/office/drawing/2014/main" id="{8B19FA08-1F3C-6C43-0763-3FCA4B8298C4}"/>
-                </a:ext>
-              </a:extLst>
-            </p:cNvPr>
-            <p:cNvCxnSpPr>
-              <a:cxnSpLocks/>
-              <a:stCxn id="5" idx="1"/>
-              <a:endCxn id="9" idx="0"/>
-            </p:cNvCxnSpPr>
-            <p:nvPr/>
-          </p:nvCxnSpPr>
-          <p:spPr>
-            <a:xfrm rot="10800000" flipV="1">
-              <a:off x="6561083" y="333744"/>
-              <a:ext cx="1080350" cy="455710"/>
-            </a:xfrm>
-            <a:prstGeom prst="bentConnector2">
-              <a:avLst/>
-            </a:prstGeom>
-            <a:ln w="38100">
-              <a:tailEnd type="triangle"/>
-            </a:ln>
-          </p:spPr>
-          <p:style>
-            <a:lnRef idx="2">
-              <a:schemeClr val="dk1"/>
-            </a:lnRef>
-            <a:fillRef idx="0">
-              <a:schemeClr val="dk1"/>
-            </a:fillRef>
-            <a:effectRef idx="1">
-              <a:schemeClr val="dk1"/>
-            </a:effectRef>
-            <a:fontRef idx="minor">
-              <a:schemeClr val="tx1"/>
-            </a:fontRef>
-          </p:style>
-        </p:cxnSp>
-        <p:cxnSp>
-          <p:nvCxnSpPr>
             <p:cNvPr id="98" name="Straight Arrow Connector 97">
               <a:extLst>
                 <a:ext uri="{FF2B5EF4-FFF2-40B4-BE49-F238E27FC236}">
@@ -4254,6 +4099,7 @@
               </a:extLst>
             </p:cNvPr>
             <p:cNvCxnSpPr>
+              <a:cxnSpLocks/>
               <a:stCxn id="35" idx="0"/>
               <a:endCxn id="4" idx="2"/>
             </p:cNvCxnSpPr>
@@ -4296,6 +4142,7 @@
               </a:extLst>
             </p:cNvPr>
             <p:cNvCxnSpPr>
+              <a:cxnSpLocks/>
               <a:stCxn id="53" idx="3"/>
               <a:endCxn id="4" idx="1"/>
             </p:cNvCxnSpPr>
@@ -4341,6 +4188,7 @@
               </a:extLst>
             </p:cNvPr>
             <p:cNvCxnSpPr>
+              <a:cxnSpLocks/>
               <a:stCxn id="45" idx="3"/>
               <a:endCxn id="4" idx="1"/>
             </p:cNvCxnSpPr>
@@ -4419,49 +4267,6 @@
         </p:cxnSp>
         <p:cxnSp>
           <p:nvCxnSpPr>
-            <p:cNvPr id="117" name="Straight Arrow Connector 116">
-              <a:extLst>
-                <a:ext uri="{FF2B5EF4-FFF2-40B4-BE49-F238E27FC236}">
-                  <a16:creationId xmlns:a16="http://schemas.microsoft.com/office/drawing/2014/main" id="{F5869E8A-DB68-B11E-94DA-834A5205B782}"/>
-                </a:ext>
-              </a:extLst>
-            </p:cNvPr>
-            <p:cNvCxnSpPr>
-              <a:cxnSpLocks/>
-              <a:stCxn id="9" idx="1"/>
-              <a:endCxn id="11" idx="3"/>
-            </p:cNvCxnSpPr>
-            <p:nvPr/>
-          </p:nvCxnSpPr>
-          <p:spPr>
-            <a:xfrm flipH="1">
-              <a:off x="4736742" y="1112647"/>
-              <a:ext cx="1209486" cy="0"/>
-            </a:xfrm>
-            <a:prstGeom prst="straightConnector1">
-              <a:avLst/>
-            </a:prstGeom>
-            <a:ln w="38100">
-              <a:tailEnd type="triangle"/>
-            </a:ln>
-          </p:spPr>
-          <p:style>
-            <a:lnRef idx="2">
-              <a:schemeClr val="dk1"/>
-            </a:lnRef>
-            <a:fillRef idx="0">
-              <a:schemeClr val="dk1"/>
-            </a:fillRef>
-            <a:effectRef idx="1">
-              <a:schemeClr val="dk1"/>
-            </a:effectRef>
-            <a:fontRef idx="minor">
-              <a:schemeClr val="tx1"/>
-            </a:fontRef>
-          </p:style>
-        </p:cxnSp>
-        <p:cxnSp>
-          <p:nvCxnSpPr>
             <p:cNvPr id="132" name="Connector: Elbow 131">
               <a:extLst>
                 <a:ext uri="{FF2B5EF4-FFF2-40B4-BE49-F238E27FC236}">
@@ -4471,17 +4276,19 @@
             </p:cNvPr>
             <p:cNvCxnSpPr>
               <a:cxnSpLocks/>
+              <a:stCxn id="7" idx="1"/>
+              <a:endCxn id="11" idx="3"/>
             </p:cNvCxnSpPr>
             <p:nvPr/>
           </p:nvCxnSpPr>
           <p:spPr>
-            <a:xfrm rot="10800000">
-              <a:off x="4746975" y="1191271"/>
-              <a:ext cx="2894460" cy="460852"/>
+            <a:xfrm rot="10800000" flipV="1">
+              <a:off x="4736743" y="923803"/>
+              <a:ext cx="2439195" cy="188843"/>
             </a:xfrm>
             <a:prstGeom prst="bentConnector3">
               <a:avLst>
-                <a:gd name="adj1" fmla="val 63717"/>
+                <a:gd name="adj1" fmla="val 50000"/>
               </a:avLst>
             </a:prstGeom>
             <a:ln w="38100">
@@ -4565,6 +4372,7 @@
               </a:extLst>
             </p:cNvPr>
             <p:cNvCxnSpPr>
+              <a:cxnSpLocks/>
               <a:stCxn id="37" idx="3"/>
               <a:endCxn id="140" idx="1"/>
             </p:cNvCxnSpPr>
@@ -4607,6 +4415,7 @@
               </a:extLst>
             </p:cNvPr>
             <p:cNvCxnSpPr>
+              <a:cxnSpLocks/>
               <a:stCxn id="30" idx="3"/>
               <a:endCxn id="140" idx="1"/>
             </p:cNvCxnSpPr>
@@ -4652,6 +4461,7 @@
               </a:extLst>
             </p:cNvPr>
             <p:cNvCxnSpPr>
+              <a:cxnSpLocks/>
               <a:stCxn id="11" idx="2"/>
               <a:endCxn id="140" idx="0"/>
             </p:cNvCxnSpPr>
@@ -4694,6 +4504,7 @@
               </a:extLst>
             </p:cNvPr>
             <p:cNvCxnSpPr>
+              <a:cxnSpLocks/>
               <a:stCxn id="140" idx="2"/>
               <a:endCxn id="4" idx="0"/>
             </p:cNvCxnSpPr>
@@ -4736,6 +4547,7 @@
               </a:extLst>
             </p:cNvPr>
             <p:cNvCxnSpPr>
+              <a:cxnSpLocks/>
               <a:stCxn id="4" idx="3"/>
               <a:endCxn id="25" idx="1"/>
             </p:cNvCxnSpPr>
@@ -4778,6 +4590,7 @@
               </a:extLst>
             </p:cNvPr>
             <p:cNvCxnSpPr>
+              <a:cxnSpLocks/>
               <a:stCxn id="64" idx="1"/>
             </p:cNvCxnSpPr>
             <p:nvPr/>
@@ -4985,7 +4798,7 @@
           </p:nvSpPr>
           <p:spPr>
             <a:xfrm rot="5400000">
-              <a:off x="6566159" y="4579161"/>
+              <a:off x="4440443" y="4555926"/>
               <a:ext cx="1235242" cy="553453"/>
             </a:xfrm>
             <a:prstGeom prst="rect">
@@ -5083,7 +4896,7 @@
           </p:nvSpPr>
           <p:spPr>
             <a:xfrm>
-              <a:off x="5198369" y="4085753"/>
+              <a:off x="5475950" y="4084905"/>
               <a:ext cx="1146405" cy="1495494"/>
             </a:xfrm>
             <a:prstGeom prst="rect">
@@ -5162,7 +4975,7 @@
               <a:pPr algn="ctr"/>
               <a:r>
                 <a:rPr lang="en-US" dirty="0"/>
-                <a:t>Battery + System</a:t>
+                <a:t>Battery</a:t>
               </a:r>
             </a:p>
           </p:txBody>
@@ -5181,7 +4994,7 @@
           </p:nvSpPr>
           <p:spPr>
             <a:xfrm>
-              <a:off x="6696128" y="584355"/>
+              <a:off x="4640179" y="614459"/>
               <a:ext cx="835771" cy="1159168"/>
             </a:xfrm>
             <a:prstGeom prst="rect">
@@ -5230,7 +5043,7 @@
           </p:nvSpPr>
           <p:spPr>
             <a:xfrm>
-              <a:off x="6676615" y="-285166"/>
+              <a:off x="4620462" y="-278297"/>
               <a:ext cx="875206" cy="793582"/>
             </a:xfrm>
             <a:prstGeom prst="rect">
@@ -5261,55 +5074,6 @@
               <a:r>
                 <a:rPr lang="en-US" dirty="0"/>
                 <a:t>Fan</a:t>
-              </a:r>
-            </a:p>
-          </p:txBody>
-        </p:sp>
-        <p:sp>
-          <p:nvSpPr>
-            <p:cNvPr id="29" name="Rectangle 28">
-              <a:extLst>
-                <a:ext uri="{FF2B5EF4-FFF2-40B4-BE49-F238E27FC236}">
-                  <a16:creationId xmlns:a16="http://schemas.microsoft.com/office/drawing/2014/main" id="{B3AFC6E5-FEC6-9A8E-F89B-B4B7C7B61276}"/>
-                </a:ext>
-              </a:extLst>
-            </p:cNvPr>
-            <p:cNvSpPr/>
-            <p:nvPr/>
-          </p:nvSpPr>
-          <p:spPr>
-            <a:xfrm>
-              <a:off x="4640179" y="-678802"/>
-              <a:ext cx="1848192" cy="2399090"/>
-            </a:xfrm>
-            <a:prstGeom prst="rect">
-              <a:avLst/>
-            </a:prstGeom>
-          </p:spPr>
-          <p:style>
-            <a:lnRef idx="2">
-              <a:schemeClr val="accent1">
-                <a:shade val="15000"/>
-              </a:schemeClr>
-            </a:lnRef>
-            <a:fillRef idx="1">
-              <a:schemeClr val="accent1"/>
-            </a:fillRef>
-            <a:effectRef idx="0">
-              <a:schemeClr val="accent1"/>
-            </a:effectRef>
-            <a:fontRef idx="minor">
-              <a:schemeClr val="lt1"/>
-            </a:fontRef>
-          </p:style>
-          <p:txBody>
-            <a:bodyPr rtlCol="0" anchor="ctr"/>
-            <a:lstStyle/>
-            <a:p>
-              <a:pPr algn="ctr"/>
-              <a:r>
-                <a:rPr lang="en-US" dirty="0"/>
-                <a:t>Solar Pannel</a:t>
               </a:r>
             </a:p>
           </p:txBody>
